--- a/decks/01_beginner/01_beginner.pptx
+++ b/decks/01_beginner/01_beginner.pptx
@@ -2011,7 +2011,7 @@
           <a:lstStyle/>
           <a:p>
             <a:r>
-              <a:t>직접 그리는 것도 좋지만, 복잡한 일은 다 차려진 밥상이 편하죠. Deep Agents입니다.</a:t>
+              <a:t>직접 그리는 것도 좋지만, 파일 작업과 서브에이전트가 필요한 장기 작업에는 Deep Agents 하네스가 편합니다. 계획이 필요한 작업에서는 TodoListMiddleware를 명시적으로 붙입니다.</a:t>
             </a:r>
           </a:p>
         </p:txBody>
@@ -2081,7 +2081,7 @@
           <a:lstStyle/>
           <a:p>
             <a:r>
-              <a:t>헷갈리기 쉬운데, 셋은 경쟁 관계가 아닙니다. 맨 아래 LangChain이 모델과 도구를 잇는 토대이고, 그 위에 LangGraph가 흐름 제어를 얹고, 맨 위 Deep Agents가 계획·파일까지 내장한 올인원입니다. 위로 갈수록 더 많은 게 들어있고, 각 층은 아래 층을 그대로 씁니다.</a:t>
+              <a:t>헷갈리기 쉬운데, 셋은 경쟁 관계가 아닙니다. 맨 아래 LangChain이 모델과 도구를 잇는 토대이고, 그 위에 LangGraph가 흐름 제어를 얹습니다. Deep Agents는 그 위에 파일, 서브에이전트, 백엔드가 붙은 장기 작업 하네스입니다. 계획 도구는 이제 기본이라고 외우기보다, 필요한 작업에서 TodoListMiddleware로 붙인다고 기억하면 됩니다.</a:t>
             </a:r>
           </a:p>
         </p:txBody>
@@ -2151,7 +2151,7 @@
           <a:lstStyle/>
           <a:p>
             <a:r>
-              <a:t>create_deep_agent는 모델만 넘겨도 다섯 가지가 딸려옵니다. 계획을 세우는 투두, 중간 결과를 파일에 저장하는 컨텍스트 관리, 교체 가능한 백엔드, 일을 맡기는 서브에이전트, 그리고 영구 메모리예요. 이걸 통틀어 하네스라고 부릅니다.</a:t>
+              <a:t>Deep Agents는 하네스 자체와 선택 미들웨어를 구분해서 봐야 합니다. 파일 작업, 백엔드, 서브에이전트는 장기 작업의 중심 표면이고, 단계 계획은 TodoListMiddleware를 붙였을 때 활성화됩니다. 그래서 최신 버전에서는 모델만 넘기면 계획까지 항상 켜진다고 설명하지 않습니다.</a:t>
             </a:r>
           </a:p>
         </p:txBody>
@@ -2221,7 +2221,7 @@
           <a:lstStyle/>
           <a:p>
             <a:r>
-              <a:t>여기서 LangChain이랑 다른 점이 하나 있어요. Deep Agents는 도구를 줄 때 @tool을 안 붙여도 됩니다. 그냥 설명문과 타입 힌트가 달린 순수 함수를 그대로 넘기면 돼요. ▶ greet 도구를 단 에이전트를 돌려보면, 계획·파일 도구가 이미 안에 들어있는 걸 볼 수 있습니다.</a:t>
+              <a:t>도구를 순수 함수로 넘기는 패턴은 유지됩니다. 달라진 포인트는 계획입니다. 리서치나 보고서처럼 여러 단계를 추적해야 할 때 TodoListMiddleware를 middleware 목록에 명시합니다. 이 한 줄이 있어야 todo 상태를 수업에서 다룰 수 있습니다.</a:t>
             </a:r>
           </a:p>
         </p:txBody>
@@ -2711,7 +2711,7 @@
           <a:lstStyle/>
           <a:p>
             <a:r>
-              <a:t>이제 이 검색 도구와 시스템 프롬프트만 create_deep_agent에 넘기면 끝이에요. 계획 세우고, 검색하고, 중간 노트 쓰고, 종합하는 건 내장 기능이 알아서 합니다. ▶ 'LangChain v1 변경사항 요약해줘' 하고 스트리밍으로 돌리면, 도구 호출부터 요약까지 전 과정이 보입니다.</a:t>
+              <a:t>검색 도구와 시스템 프롬프트만으로도 에이전트는 만들 수 있습니다. 다만 긴 리서치처럼 단계 관리가 필요하면 TodoListMiddleware를 함께 붙여야 합니다. 이렇게 하면 검색, 중간 메모, 종합 단계를 todo로 관찰하면서 설명할 수 있습니다.</a:t>
             </a:r>
           </a:p>
         </p:txBody>
@@ -2781,7 +2781,7 @@
           <a:lstStyle/>
           <a:p>
             <a:r>
-              <a:t>같은 걸 LangChain으로도 만들어 비교해 보면 성격 차이가 분명해져요. Deep Agents는 계획·파일이 공짜로 들어있고, LangChain은 기본 ReAct라 그런 게 필요하면 직접 붙여야 합니다. 입문은 여기까지고, 다음 중급에서는 미들웨어·MCP·HITL·RAG로 더 깊이 들어갑니다.</a:t>
+              <a:t>같은 걸 LangChain으로도 만들어 비교해 보면 성격 차이가 분명해져요. LangChain은 바로 검색하고 요약하는 데 가볍고, Deep Agents는 파일 작업과 서브에이전트가 필요한 장기 작업에 맞습니다. todo 계획은 Deep Agents 0.7 기준으로 명시한 미들웨어가 담당합니다.</a:t>
             </a:r>
           </a:p>
         </p:txBody>
@@ -6279,7 +6279,7 @@
       <p:grpSpPr/>
       <p:pic>
         <p:nvPicPr>
-          <p:cNvPr id="2" name="Picture 1" descr="hp-01.png"/>
+          <p:cNvPr id="2" name="Picture 1" descr="hp-001.png"/>
           <p:cNvPicPr>
             <a:picLocks noChangeAspect="1"/>
           </p:cNvPicPr>
@@ -6321,7 +6321,7 @@
       <p:grpSpPr/>
       <p:pic>
         <p:nvPicPr>
-          <p:cNvPr id="2" name="Picture 1" descr="hp-10.png"/>
+          <p:cNvPr id="2" name="Picture 1" descr="hp-010.png"/>
           <p:cNvPicPr>
             <a:picLocks noChangeAspect="1"/>
           </p:cNvPicPr>
@@ -6363,7 +6363,7 @@
       <p:grpSpPr/>
       <p:pic>
         <p:nvPicPr>
-          <p:cNvPr id="2" name="Picture 1" descr="hp-11.png"/>
+          <p:cNvPr id="2" name="Picture 1" descr="hp-011.png"/>
           <p:cNvPicPr>
             <a:picLocks noChangeAspect="1"/>
           </p:cNvPicPr>
@@ -6405,7 +6405,7 @@
       <p:grpSpPr/>
       <p:pic>
         <p:nvPicPr>
-          <p:cNvPr id="2" name="Picture 1" descr="hp-12.png"/>
+          <p:cNvPr id="2" name="Picture 1" descr="hp-012.png"/>
           <p:cNvPicPr>
             <a:picLocks noChangeAspect="1"/>
           </p:cNvPicPr>
@@ -6447,7 +6447,7 @@
       <p:grpSpPr/>
       <p:pic>
         <p:nvPicPr>
-          <p:cNvPr id="2" name="Picture 1" descr="hp-13.png"/>
+          <p:cNvPr id="2" name="Picture 1" descr="hp-013.png"/>
           <p:cNvPicPr>
             <a:picLocks noChangeAspect="1"/>
           </p:cNvPicPr>
@@ -6489,7 +6489,7 @@
       <p:grpSpPr/>
       <p:pic>
         <p:nvPicPr>
-          <p:cNvPr id="2" name="Picture 1" descr="hp-14.png"/>
+          <p:cNvPr id="2" name="Picture 1" descr="hp-014.png"/>
           <p:cNvPicPr>
             <a:picLocks noChangeAspect="1"/>
           </p:cNvPicPr>
@@ -6531,7 +6531,7 @@
       <p:grpSpPr/>
       <p:pic>
         <p:nvPicPr>
-          <p:cNvPr id="2" name="Picture 1" descr="hp-15.png"/>
+          <p:cNvPr id="2" name="Picture 1" descr="hp-015.png"/>
           <p:cNvPicPr>
             <a:picLocks noChangeAspect="1"/>
           </p:cNvPicPr>
@@ -6573,7 +6573,7 @@
       <p:grpSpPr/>
       <p:pic>
         <p:nvPicPr>
-          <p:cNvPr id="2" name="Picture 1" descr="hp-16.png"/>
+          <p:cNvPr id="2" name="Picture 1" descr="hp-016.png"/>
           <p:cNvPicPr>
             <a:picLocks noChangeAspect="1"/>
           </p:cNvPicPr>
@@ -6615,7 +6615,7 @@
       <p:grpSpPr/>
       <p:pic>
         <p:nvPicPr>
-          <p:cNvPr id="2" name="Picture 1" descr="hp-17.png"/>
+          <p:cNvPr id="2" name="Picture 1" descr="hp-017.png"/>
           <p:cNvPicPr>
             <a:picLocks noChangeAspect="1"/>
           </p:cNvPicPr>
@@ -6657,7 +6657,7 @@
       <p:grpSpPr/>
       <p:pic>
         <p:nvPicPr>
-          <p:cNvPr id="2" name="Picture 1" descr="hp-18.png"/>
+          <p:cNvPr id="2" name="Picture 1" descr="hp-018.png"/>
           <p:cNvPicPr>
             <a:picLocks noChangeAspect="1"/>
           </p:cNvPicPr>
@@ -6699,7 +6699,7 @@
       <p:grpSpPr/>
       <p:pic>
         <p:nvPicPr>
-          <p:cNvPr id="2" name="Picture 1" descr="hp-19.png"/>
+          <p:cNvPr id="2" name="Picture 1" descr="hp-019.png"/>
           <p:cNvPicPr>
             <a:picLocks noChangeAspect="1"/>
           </p:cNvPicPr>
@@ -6741,7 +6741,7 @@
       <p:grpSpPr/>
       <p:pic>
         <p:nvPicPr>
-          <p:cNvPr id="2" name="Picture 1" descr="hp-02.png"/>
+          <p:cNvPr id="2" name="Picture 1" descr="hp-002.png"/>
           <p:cNvPicPr>
             <a:picLocks noChangeAspect="1"/>
           </p:cNvPicPr>
@@ -6783,7 +6783,7 @@
       <p:grpSpPr/>
       <p:pic>
         <p:nvPicPr>
-          <p:cNvPr id="2" name="Picture 1" descr="hp-20.png"/>
+          <p:cNvPr id="2" name="Picture 1" descr="hp-020.png"/>
           <p:cNvPicPr>
             <a:picLocks noChangeAspect="1"/>
           </p:cNvPicPr>
@@ -6825,7 +6825,7 @@
       <p:grpSpPr/>
       <p:pic>
         <p:nvPicPr>
-          <p:cNvPr id="2" name="Picture 1" descr="hp-21.png"/>
+          <p:cNvPr id="2" name="Picture 1" descr="hp-021.png"/>
           <p:cNvPicPr>
             <a:picLocks noChangeAspect="1"/>
           </p:cNvPicPr>
@@ -6867,7 +6867,7 @@
       <p:grpSpPr/>
       <p:pic>
         <p:nvPicPr>
-          <p:cNvPr id="2" name="Picture 1" descr="hp-22.png"/>
+          <p:cNvPr id="2" name="Picture 1" descr="hp-022.png"/>
           <p:cNvPicPr>
             <a:picLocks noChangeAspect="1"/>
           </p:cNvPicPr>
@@ -6909,7 +6909,7 @@
       <p:grpSpPr/>
       <p:pic>
         <p:nvPicPr>
-          <p:cNvPr id="2" name="Picture 1" descr="hp-23.png"/>
+          <p:cNvPr id="2" name="Picture 1" descr="hp-023.png"/>
           <p:cNvPicPr>
             <a:picLocks noChangeAspect="1"/>
           </p:cNvPicPr>
@@ -6951,7 +6951,7 @@
       <p:grpSpPr/>
       <p:pic>
         <p:nvPicPr>
-          <p:cNvPr id="2" name="Picture 1" descr="hp-24.png"/>
+          <p:cNvPr id="2" name="Picture 1" descr="hp-024.png"/>
           <p:cNvPicPr>
             <a:picLocks noChangeAspect="1"/>
           </p:cNvPicPr>
@@ -6993,7 +6993,7 @@
       <p:grpSpPr/>
       <p:pic>
         <p:nvPicPr>
-          <p:cNvPr id="2" name="Picture 1" descr="hp-25.png"/>
+          <p:cNvPr id="2" name="Picture 1" descr="hp-025.png"/>
           <p:cNvPicPr>
             <a:picLocks noChangeAspect="1"/>
           </p:cNvPicPr>
@@ -7035,7 +7035,7 @@
       <p:grpSpPr/>
       <p:pic>
         <p:nvPicPr>
-          <p:cNvPr id="2" name="Picture 1" descr="hp-26.png"/>
+          <p:cNvPr id="2" name="Picture 1" descr="hp-026.png"/>
           <p:cNvPicPr>
             <a:picLocks noChangeAspect="1"/>
           </p:cNvPicPr>
@@ -7077,7 +7077,7 @@
       <p:grpSpPr/>
       <p:pic>
         <p:nvPicPr>
-          <p:cNvPr id="2" name="Picture 1" descr="hp-27.png"/>
+          <p:cNvPr id="2" name="Picture 1" descr="hp-027.png"/>
           <p:cNvPicPr>
             <a:picLocks noChangeAspect="1"/>
           </p:cNvPicPr>
@@ -7119,7 +7119,7 @@
       <p:grpSpPr/>
       <p:pic>
         <p:nvPicPr>
-          <p:cNvPr id="2" name="Picture 1" descr="hp-28.png"/>
+          <p:cNvPr id="2" name="Picture 1" descr="hp-028.png"/>
           <p:cNvPicPr>
             <a:picLocks noChangeAspect="1"/>
           </p:cNvPicPr>
@@ -7161,7 +7161,7 @@
       <p:grpSpPr/>
       <p:pic>
         <p:nvPicPr>
-          <p:cNvPr id="2" name="Picture 1" descr="hp-29.png"/>
+          <p:cNvPr id="2" name="Picture 1" descr="hp-029.png"/>
           <p:cNvPicPr>
             <a:picLocks noChangeAspect="1"/>
           </p:cNvPicPr>
@@ -7203,7 +7203,7 @@
       <p:grpSpPr/>
       <p:pic>
         <p:nvPicPr>
-          <p:cNvPr id="2" name="Picture 1" descr="hp-03.png"/>
+          <p:cNvPr id="2" name="Picture 1" descr="hp-003.png"/>
           <p:cNvPicPr>
             <a:picLocks noChangeAspect="1"/>
           </p:cNvPicPr>
@@ -7245,7 +7245,7 @@
       <p:grpSpPr/>
       <p:pic>
         <p:nvPicPr>
-          <p:cNvPr id="2" name="Picture 1" descr="hp-30.png"/>
+          <p:cNvPr id="2" name="Picture 1" descr="hp-030.png"/>
           <p:cNvPicPr>
             <a:picLocks noChangeAspect="1"/>
           </p:cNvPicPr>
@@ -7287,7 +7287,7 @@
       <p:grpSpPr/>
       <p:pic>
         <p:nvPicPr>
-          <p:cNvPr id="2" name="Picture 1" descr="hp-31.png"/>
+          <p:cNvPr id="2" name="Picture 1" descr="hp-031.png"/>
           <p:cNvPicPr>
             <a:picLocks noChangeAspect="1"/>
           </p:cNvPicPr>
@@ -7329,7 +7329,7 @@
       <p:grpSpPr/>
       <p:pic>
         <p:nvPicPr>
-          <p:cNvPr id="2" name="Picture 1" descr="hp-32.png"/>
+          <p:cNvPr id="2" name="Picture 1" descr="hp-032.png"/>
           <p:cNvPicPr>
             <a:picLocks noChangeAspect="1"/>
           </p:cNvPicPr>
@@ -7371,7 +7371,7 @@
       <p:grpSpPr/>
       <p:pic>
         <p:nvPicPr>
-          <p:cNvPr id="2" name="Picture 1" descr="hp-33.png"/>
+          <p:cNvPr id="2" name="Picture 1" descr="hp-033.png"/>
           <p:cNvPicPr>
             <a:picLocks noChangeAspect="1"/>
           </p:cNvPicPr>
@@ -7413,7 +7413,7 @@
       <p:grpSpPr/>
       <p:pic>
         <p:nvPicPr>
-          <p:cNvPr id="2" name="Picture 1" descr="hp-34.png"/>
+          <p:cNvPr id="2" name="Picture 1" descr="hp-034.png"/>
           <p:cNvPicPr>
             <a:picLocks noChangeAspect="1"/>
           </p:cNvPicPr>
@@ -7455,7 +7455,7 @@
       <p:grpSpPr/>
       <p:pic>
         <p:nvPicPr>
-          <p:cNvPr id="2" name="Picture 1" descr="hp-35.png"/>
+          <p:cNvPr id="2" name="Picture 1" descr="hp-035.png"/>
           <p:cNvPicPr>
             <a:picLocks noChangeAspect="1"/>
           </p:cNvPicPr>
@@ -7497,7 +7497,7 @@
       <p:grpSpPr/>
       <p:pic>
         <p:nvPicPr>
-          <p:cNvPr id="2" name="Picture 1" descr="hp-36.png"/>
+          <p:cNvPr id="2" name="Picture 1" descr="hp-036.png"/>
           <p:cNvPicPr>
             <a:picLocks noChangeAspect="1"/>
           </p:cNvPicPr>
@@ -7539,7 +7539,7 @@
       <p:grpSpPr/>
       <p:pic>
         <p:nvPicPr>
-          <p:cNvPr id="2" name="Picture 1" descr="hp-37.png"/>
+          <p:cNvPr id="2" name="Picture 1" descr="hp-037.png"/>
           <p:cNvPicPr>
             <a:picLocks noChangeAspect="1"/>
           </p:cNvPicPr>
@@ -7581,7 +7581,7 @@
       <p:grpSpPr/>
       <p:pic>
         <p:nvPicPr>
-          <p:cNvPr id="2" name="Picture 1" descr="hp-38.png"/>
+          <p:cNvPr id="2" name="Picture 1" descr="hp-038.png"/>
           <p:cNvPicPr>
             <a:picLocks noChangeAspect="1"/>
           </p:cNvPicPr>
@@ -7623,7 +7623,7 @@
       <p:grpSpPr/>
       <p:pic>
         <p:nvPicPr>
-          <p:cNvPr id="2" name="Picture 1" descr="hp-39.png"/>
+          <p:cNvPr id="2" name="Picture 1" descr="hp-039.png"/>
           <p:cNvPicPr>
             <a:picLocks noChangeAspect="1"/>
           </p:cNvPicPr>
@@ -7665,7 +7665,7 @@
       <p:grpSpPr/>
       <p:pic>
         <p:nvPicPr>
-          <p:cNvPr id="2" name="Picture 1" descr="hp-04.png"/>
+          <p:cNvPr id="2" name="Picture 1" descr="hp-004.png"/>
           <p:cNvPicPr>
             <a:picLocks noChangeAspect="1"/>
           </p:cNvPicPr>
@@ -7707,7 +7707,7 @@
       <p:grpSpPr/>
       <p:pic>
         <p:nvPicPr>
-          <p:cNvPr id="2" name="Picture 1" descr="hp-40.png"/>
+          <p:cNvPr id="2" name="Picture 1" descr="hp-040.png"/>
           <p:cNvPicPr>
             <a:picLocks noChangeAspect="1"/>
           </p:cNvPicPr>
@@ -7749,7 +7749,7 @@
       <p:grpSpPr/>
       <p:pic>
         <p:nvPicPr>
-          <p:cNvPr id="2" name="Picture 1" descr="hp-05.png"/>
+          <p:cNvPr id="2" name="Picture 1" descr="hp-005.png"/>
           <p:cNvPicPr>
             <a:picLocks noChangeAspect="1"/>
           </p:cNvPicPr>
@@ -7791,7 +7791,7 @@
       <p:grpSpPr/>
       <p:pic>
         <p:nvPicPr>
-          <p:cNvPr id="2" name="Picture 1" descr="hp-06.png"/>
+          <p:cNvPr id="2" name="Picture 1" descr="hp-006.png"/>
           <p:cNvPicPr>
             <a:picLocks noChangeAspect="1"/>
           </p:cNvPicPr>
@@ -7833,7 +7833,7 @@
       <p:grpSpPr/>
       <p:pic>
         <p:nvPicPr>
-          <p:cNvPr id="2" name="Picture 1" descr="hp-07.png"/>
+          <p:cNvPr id="2" name="Picture 1" descr="hp-007.png"/>
           <p:cNvPicPr>
             <a:picLocks noChangeAspect="1"/>
           </p:cNvPicPr>
@@ -7875,7 +7875,7 @@
       <p:grpSpPr/>
       <p:pic>
         <p:nvPicPr>
-          <p:cNvPr id="2" name="Picture 1" descr="hp-08.png"/>
+          <p:cNvPr id="2" name="Picture 1" descr="hp-008.png"/>
           <p:cNvPicPr>
             <a:picLocks noChangeAspect="1"/>
           </p:cNvPicPr>
@@ -7917,7 +7917,7 @@
       <p:grpSpPr/>
       <p:pic>
         <p:nvPicPr>
-          <p:cNvPr id="2" name="Picture 1" descr="hp-09.png"/>
+          <p:cNvPr id="2" name="Picture 1" descr="hp-009.png"/>
           <p:cNvPicPr>
             <a:picLocks noChangeAspect="1"/>
           </p:cNvPicPr>
